--- a/machine_learning_with_python.pptx
+++ b/machine_learning_with_python.pptx
@@ -348,7 +348,7 @@
           <a:p>
             <a:fld id="{DBF5F7A3-80FA-4DE8-9E10-D5FD6AAF4E4C}" type="datetimeFigureOut">
               <a:rPr lang="en-US" smtClean="0"/>
-              <a:t>2025-01-13</a:t>
+              <a:t>2026-01-12</a:t>
             </a:fld>
             <a:endParaRPr lang="en-US"/>
           </a:p>
@@ -902,7 +902,7 @@
           <a:p>
             <a:fld id="{12D417FB-DB75-4510-8AD7-5416595AADD8}" type="datetime1">
               <a:rPr lang="en-US" smtClean="0"/>
-              <a:t>2025-01-13</a:t>
+              <a:t>2026-01-12</a:t>
             </a:fld>
             <a:endParaRPr lang="en-US"/>
           </a:p>
@@ -3270,7 +3270,7 @@
           <a:p>
             <a:fld id="{EC448E59-F64F-416B-85C7-F58EA54BAF31}" type="datetime1">
               <a:rPr lang="nl-BE" smtClean="0"/>
-              <a:t>13/01/2025</a:t>
+              <a:t>12/01/2026</a:t>
             </a:fld>
             <a:endParaRPr lang="nl-BE"/>
           </a:p>
@@ -3516,7 +3516,7 @@
           <a:p>
             <a:fld id="{9ED5C3B5-60AD-4494-9CFA-8B02B158E887}" type="datetime1">
               <a:rPr lang="nl-BE" smtClean="0"/>
-              <a:t>13/01/2025</a:t>
+              <a:t>12/01/2026</a:t>
             </a:fld>
             <a:endParaRPr lang="nl-BE"/>
           </a:p>
@@ -3634,7 +3634,7 @@
           <a:p>
             <a:fld id="{1E4894A8-27B8-4F4D-B345-90FD4A1447E9}" type="datetime1">
               <a:rPr lang="nl-BE" smtClean="0"/>
-              <a:t>13/01/2025</a:t>
+              <a:t>12/01/2026</a:t>
             </a:fld>
             <a:endParaRPr lang="nl-BE"/>
           </a:p>
@@ -3922,7 +3922,7 @@
           <a:p>
             <a:fld id="{44F0EF99-E673-4972-A23A-EB3FD1F7D254}" type="datetime1">
               <a:rPr lang="nl-BE" smtClean="0"/>
-              <a:t>13/01/2025</a:t>
+              <a:t>12/01/2026</a:t>
             </a:fld>
             <a:endParaRPr lang="nl-BE"/>
           </a:p>
@@ -31422,7 +31422,7 @@
         </p:blipFill>
         <p:spPr bwMode="auto">
           <a:xfrm>
-            <a:off x="4937927" y="2944514"/>
+            <a:off x="8051239" y="2617942"/>
             <a:ext cx="2479910" cy="2113560"/>
           </a:xfrm>
           <a:prstGeom prst="rect">

--- a/machine_learning_with_python.pptx
+++ b/machine_learning_with_python.pptx
@@ -11148,7 +11148,7 @@
               <a:rPr lang="en-GB" sz="1800" dirty="0">
                 <a:hlinkClick r:id="rId2"/>
               </a:rPr>
-              <a:t>https://github.com/gjbex/Python-for-machine-learning/tree/master/source-code/scikit-learn</a:t>
+              <a:t>https://github.com/gjbex/Machine-learning-with-Python/tree/master/source-code/scikit-learn</a:t>
             </a:r>
             <a:r>
               <a:rPr lang="en-GB" sz="1800" dirty="0"/>
@@ -31118,7 +31118,7 @@
               <a:rPr lang="en-GB" sz="1800" dirty="0">
                 <a:hlinkClick r:id="rId2"/>
               </a:rPr>
-              <a:t>https://github.com/gjbex/Python-for-machine-learning/tree/master/source-code/pytorch</a:t>
+              <a:t>https://github.com/gjbex/Machine-learning-with-Python/tree/master/source-code/pytorch</a:t>
             </a:r>
             <a:r>
               <a:rPr lang="en-GB" sz="1800" dirty="0"/>
@@ -42331,7 +42331,7 @@
         <p:spPr/>
         <p:txBody>
           <a:bodyPr>
-            <a:normAutofit fontScale="85000" lnSpcReduction="20000"/>
+            <a:normAutofit fontScale="92500" lnSpcReduction="20000"/>
           </a:bodyPr>
           <a:lstStyle/>
           <a:p>
@@ -42368,7 +42368,7 @@
           <a:p>
             <a:r>
               <a:rPr lang="en-US" dirty="0" err="1"/>
-              <a:t>Keras</a:t>
+              <a:t>PyTorch</a:t>
             </a:r>
             <a:endParaRPr lang="en-US" dirty="0"/>
           </a:p>
@@ -42377,13 +42377,6 @@
             <a:r>
               <a:rPr lang="en-US" dirty="0"/>
               <a:t>very versatile</a:t>
-            </a:r>
-          </a:p>
-          <a:p>
-            <a:pPr lvl="1"/>
-            <a:r>
-              <a:rPr lang="en-US" dirty="0"/>
-              <a:t>offers access to TensorFlow backend for low-level</a:t>
             </a:r>
           </a:p>
           <a:p>
@@ -42706,15 +42699,33 @@
                                   </p:childTnLst>
                                 </p:cTn>
                               </p:par>
+                            </p:childTnLst>
+                          </p:cTn>
+                        </p:par>
+                      </p:childTnLst>
+                    </p:cTn>
+                  </p:par>
+                  <p:par>
+                    <p:cTn id="19" fill="hold">
+                      <p:stCondLst>
+                        <p:cond delay="indefinite"/>
+                      </p:stCondLst>
+                      <p:childTnLst>
+                        <p:par>
+                          <p:cTn id="20" fill="hold">
+                            <p:stCondLst>
+                              <p:cond delay="0"/>
+                            </p:stCondLst>
+                            <p:childTnLst>
                               <p:par>
-                                <p:cTn id="19" presetID="1" presetClass="entr" presetSubtype="0" fill="hold" grpId="0" nodeType="withEffect">
+                                <p:cTn id="21" presetID="1" presetClass="entr" presetSubtype="0" fill="hold" grpId="0" nodeType="clickEffect">
                                   <p:stCondLst>
                                     <p:cond delay="0"/>
                                   </p:stCondLst>
                                   <p:childTnLst>
                                     <p:set>
                                       <p:cBhvr>
-                                        <p:cTn id="20" dur="1" fill="hold">
+                                        <p:cTn id="22" dur="1" fill="hold">
                                           <p:stCondLst>
                                             <p:cond delay="0"/>
                                           </p:stCondLst>
@@ -42744,26 +42755,26 @@
                     </p:cTn>
                   </p:par>
                   <p:par>
-                    <p:cTn id="21" fill="hold">
+                    <p:cTn id="23" fill="hold">
                       <p:stCondLst>
                         <p:cond delay="indefinite"/>
                       </p:stCondLst>
                       <p:childTnLst>
                         <p:par>
-                          <p:cTn id="22" fill="hold">
+                          <p:cTn id="24" fill="hold">
                             <p:stCondLst>
                               <p:cond delay="0"/>
                             </p:stCondLst>
                             <p:childTnLst>
                               <p:par>
-                                <p:cTn id="23" presetID="1" presetClass="entr" presetSubtype="0" fill="hold" grpId="0" nodeType="clickEffect">
+                                <p:cTn id="25" presetID="1" presetClass="entr" presetSubtype="0" fill="hold" grpId="0" nodeType="clickEffect">
                                   <p:stCondLst>
                                     <p:cond delay="0"/>
                                   </p:stCondLst>
                                   <p:childTnLst>
                                     <p:set>
                                       <p:cBhvr>
-                                        <p:cTn id="24" dur="1" fill="hold">
+                                        <p:cTn id="26" dur="1" fill="hold">
                                           <p:stCondLst>
                                             <p:cond delay="0"/>
                                           </p:stCondLst>
@@ -42793,26 +42804,26 @@
                     </p:cTn>
                   </p:par>
                   <p:par>
-                    <p:cTn id="25" fill="hold">
+                    <p:cTn id="27" fill="hold">
                       <p:stCondLst>
                         <p:cond delay="indefinite"/>
                       </p:stCondLst>
                       <p:childTnLst>
                         <p:par>
-                          <p:cTn id="26" fill="hold">
+                          <p:cTn id="28" fill="hold">
                             <p:stCondLst>
                               <p:cond delay="0"/>
                             </p:stCondLst>
                             <p:childTnLst>
                               <p:par>
-                                <p:cTn id="27" presetID="1" presetClass="entr" presetSubtype="0" fill="hold" grpId="0" nodeType="clickEffect">
+                                <p:cTn id="29" presetID="1" presetClass="entr" presetSubtype="0" fill="hold" grpId="0" nodeType="clickEffect">
                                   <p:stCondLst>
                                     <p:cond delay="0"/>
                                   </p:stCondLst>
                                   <p:childTnLst>
                                     <p:set>
                                       <p:cBhvr>
-                                        <p:cTn id="28" dur="1" fill="hold">
+                                        <p:cTn id="30" dur="1" fill="hold">
                                           <p:stCondLst>
                                             <p:cond delay="0"/>
                                           </p:stCondLst>
@@ -42842,26 +42853,26 @@
                     </p:cTn>
                   </p:par>
                   <p:par>
-                    <p:cTn id="29" fill="hold">
+                    <p:cTn id="31" fill="hold">
                       <p:stCondLst>
                         <p:cond delay="indefinite"/>
                       </p:stCondLst>
                       <p:childTnLst>
                         <p:par>
-                          <p:cTn id="30" fill="hold">
+                          <p:cTn id="32" fill="hold">
                             <p:stCondLst>
                               <p:cond delay="0"/>
                             </p:stCondLst>
                             <p:childTnLst>
                               <p:par>
-                                <p:cTn id="31" presetID="1" presetClass="entr" presetSubtype="0" fill="hold" grpId="0" nodeType="clickEffect">
+                                <p:cTn id="33" presetID="1" presetClass="entr" presetSubtype="0" fill="hold" grpId="0" nodeType="clickEffect">
                                   <p:stCondLst>
                                     <p:cond delay="0"/>
                                   </p:stCondLst>
                                   <p:childTnLst>
                                     <p:set>
                                       <p:cBhvr>
-                                        <p:cTn id="32" dur="1" fill="hold">
+                                        <p:cTn id="34" dur="1" fill="hold">
                                           <p:stCondLst>
                                             <p:cond delay="0"/>
                                           </p:stCondLst>
@@ -42870,55 +42881,6 @@
                                           <p:spTgt spid="3">
                                             <p:txEl>
                                               <p:pRg st="9" end="9"/>
-                                            </p:txEl>
-                                          </p:spTgt>
-                                        </p:tgtEl>
-                                        <p:attrNameLst>
-                                          <p:attrName>style.visibility</p:attrName>
-                                        </p:attrNameLst>
-                                      </p:cBhvr>
-                                      <p:to>
-                                        <p:strVal val="visible"/>
-                                      </p:to>
-                                    </p:set>
-                                  </p:childTnLst>
-                                </p:cTn>
-                              </p:par>
-                            </p:childTnLst>
-                          </p:cTn>
-                        </p:par>
-                      </p:childTnLst>
-                    </p:cTn>
-                  </p:par>
-                  <p:par>
-                    <p:cTn id="33" fill="hold">
-                      <p:stCondLst>
-                        <p:cond delay="indefinite"/>
-                      </p:stCondLst>
-                      <p:childTnLst>
-                        <p:par>
-                          <p:cTn id="34" fill="hold">
-                            <p:stCondLst>
-                              <p:cond delay="0"/>
-                            </p:stCondLst>
-                            <p:childTnLst>
-                              <p:par>
-                                <p:cTn id="35" presetID="1" presetClass="entr" presetSubtype="0" fill="hold" grpId="0" nodeType="clickEffect">
-                                  <p:stCondLst>
-                                    <p:cond delay="0"/>
-                                  </p:stCondLst>
-                                  <p:childTnLst>
-                                    <p:set>
-                                      <p:cBhvr>
-                                        <p:cTn id="36" dur="1" fill="hold">
-                                          <p:stCondLst>
-                                            <p:cond delay="0"/>
-                                          </p:stCondLst>
-                                        </p:cTn>
-                                        <p:tgtEl>
-                                          <p:spTgt spid="3">
-                                            <p:txEl>
-                                              <p:pRg st="10" end="10"/>
                                             </p:txEl>
                                           </p:spTgt>
                                         </p:tgtEl>
@@ -43024,61 +42986,68 @@
           <a:lstStyle/>
           <a:p>
             <a:r>
-              <a:rPr lang="en-US" i="1" dirty="0"/>
-              <a:t>Hands-on machine learning with </a:t>
-            </a:r>
-            <a:r>
-              <a:rPr lang="en-US" i="1" dirty="0" err="1"/>
-              <a:t>scikit</a:t>
-            </a:r>
-            <a:r>
-              <a:rPr lang="en-US" i="1" dirty="0"/>
-              <a:t>-learn &amp; TensorFlow</a:t>
+              <a:rPr lang="" i="1" dirty="0"/>
+              <a:t>Hands-On Machine Learning with Scikit-Learn and PyTorch</a:t>
+            </a:r>
+            <a:br>
+              <a:rPr lang="" dirty="0"/>
+            </a:br>
+            <a:r>
+              <a:rPr lang="" dirty="0"/>
+              <a:t>Aurélien Géron</a:t>
+            </a:r>
+            <a:br>
+              <a:rPr lang="" dirty="0"/>
+            </a:br>
+            <a:r>
+              <a:rPr lang="" dirty="0"/>
+              <a:t>O’Reilly Media, 2025</a:t>
+            </a:r>
+          </a:p>
+          <a:p>
+            <a:r>
+              <a:rPr lang="" i="1" dirty="0"/>
+              <a:t>Deep Learning with PyTorch, Second Edition</a:t>
+            </a:r>
+            <a:br>
+              <a:rPr lang="" dirty="0"/>
+            </a:br>
+            <a:r>
+              <a:rPr lang="" dirty="0"/>
+              <a:t>Howard Huang, Eli Stevens, Luca Antiga and Thomas Viehmann</a:t>
+            </a:r>
+            <a:br>
+              <a:rPr lang="" dirty="0"/>
+            </a:br>
+            <a:r>
+              <a:rPr lang="" dirty="0"/>
+              <a:t>Manning, 2026</a:t>
+            </a:r>
+          </a:p>
+          <a:p>
+            <a:endParaRPr lang="en-US" dirty="0"/>
+          </a:p>
+          <a:p>
+            <a:r>
+              <a:rPr lang="en-US" dirty="0"/>
+              <a:t>Excellent </a:t>
+            </a:r>
+            <a:r>
+              <a:rPr lang="en-US" dirty="0" err="1"/>
+              <a:t>PyTorch</a:t>
+            </a:r>
+            <a:r>
+              <a:rPr lang="en-US" dirty="0"/>
+              <a:t> tutorial</a:t>
             </a:r>
             <a:br>
               <a:rPr lang="en-US" dirty="0"/>
             </a:br>
             <a:r>
-              <a:rPr lang="en-US" dirty="0" err="1"/>
-              <a:t>Aurélien</a:t>
-            </a:r>
-            <a:r>
-              <a:rPr lang="en-US" dirty="0"/>
-              <a:t> </a:t>
-            </a:r>
-            <a:r>
-              <a:rPr lang="en-US" dirty="0" err="1"/>
-              <a:t>Géron</a:t>
-            </a:r>
-            <a:br>
-              <a:rPr lang="en-US" dirty="0"/>
-            </a:br>
-            <a:r>
-              <a:rPr lang="en-US" dirty="0"/>
-              <a:t>O'Reilly, 2017</a:t>
-            </a:r>
-          </a:p>
-          <a:p>
-            <a:r>
-              <a:rPr lang="en-US" dirty="0"/>
-              <a:t>Excellent </a:t>
-            </a:r>
-            <a:r>
-              <a:rPr lang="en-US" dirty="0" err="1"/>
-              <a:t>keras</a:t>
-            </a:r>
-            <a:r>
-              <a:rPr lang="en-US" dirty="0"/>
-              <a:t> tutorial</a:t>
-            </a:r>
-            <a:br>
-              <a:rPr lang="en-US" dirty="0"/>
-            </a:br>
-            <a:r>
               <a:rPr lang="en-US" sz="2400" dirty="0">
                 <a:hlinkClick r:id="rId2"/>
               </a:rPr>
-              <a:t>https://github.com/leriomaggio/deep-learning-keras-tensorflow</a:t>
+              <a:t>https://pytorch.org/tutorials/beginner/basics/intro.html</a:t>
             </a:r>
             <a:r>
               <a:rPr lang="en-US" sz="2400" dirty="0"/>
@@ -43210,6 +43179,55 @@
                                           <p:spTgt spid="3">
                                             <p:txEl>
                                               <p:pRg st="1" end="1"/>
+                                            </p:txEl>
+                                          </p:spTgt>
+                                        </p:tgtEl>
+                                        <p:attrNameLst>
+                                          <p:attrName>style.visibility</p:attrName>
+                                        </p:attrNameLst>
+                                      </p:cBhvr>
+                                      <p:to>
+                                        <p:strVal val="visible"/>
+                                      </p:to>
+                                    </p:set>
+                                  </p:childTnLst>
+                                </p:cTn>
+                              </p:par>
+                            </p:childTnLst>
+                          </p:cTn>
+                        </p:par>
+                      </p:childTnLst>
+                    </p:cTn>
+                  </p:par>
+                  <p:par>
+                    <p:cTn id="11" fill="hold">
+                      <p:stCondLst>
+                        <p:cond delay="indefinite"/>
+                      </p:stCondLst>
+                      <p:childTnLst>
+                        <p:par>
+                          <p:cTn id="12" fill="hold">
+                            <p:stCondLst>
+                              <p:cond delay="0"/>
+                            </p:stCondLst>
+                            <p:childTnLst>
+                              <p:par>
+                                <p:cTn id="13" presetID="1" presetClass="entr" presetSubtype="0" fill="hold" grpId="0" nodeType="clickEffect">
+                                  <p:stCondLst>
+                                    <p:cond delay="0"/>
+                                  </p:stCondLst>
+                                  <p:childTnLst>
+                                    <p:set>
+                                      <p:cBhvr>
+                                        <p:cTn id="14" dur="1" fill="hold">
+                                          <p:stCondLst>
+                                            <p:cond delay="0"/>
+                                          </p:stCondLst>
+                                        </p:cTn>
+                                        <p:tgtEl>
+                                          <p:spTgt spid="3">
+                                            <p:txEl>
+                                              <p:pRg st="3" end="3"/>
                                             </p:txEl>
                                           </p:spTgt>
                                         </p:tgtEl>

--- a/machine_learning_with_python.pptx
+++ b/machine_learning_with_python.pptx
@@ -350,7 +350,7 @@
           <a:p>
             <a:fld id="{DBF5F7A3-80FA-4DE8-9E10-D5FD6AAF4E4C}" type="datetimeFigureOut">
               <a:rPr lang="en-US" smtClean="0"/>
-              <a:t>2026-08-13</a:t>
+              <a:t>2026-08-18</a:t>
             </a:fld>
             <a:endParaRPr lang="en-US"/>
           </a:p>
@@ -904,7 +904,7 @@
           <a:p>
             <a:fld id="{12D417FB-DB75-4510-8AD7-5416595AADD8}" type="datetime1">
               <a:rPr lang="en-US" smtClean="0"/>
-              <a:t>2026-08-13</a:t>
+              <a:t>2026-08-18</a:t>
             </a:fld>
             <a:endParaRPr lang="en-US"/>
           </a:p>
@@ -3272,7 +3272,7 @@
           <a:p>
             <a:fld id="{EC448E59-F64F-416B-85C7-F58EA54BAF31}" type="datetime1">
               <a:rPr lang="nl-BE" smtClean="0"/>
-              <a:t>13/08/2026</a:t>
+              <a:t>18/08/2026</a:t>
             </a:fld>
             <a:endParaRPr lang="nl-BE"/>
           </a:p>
@@ -3518,7 +3518,7 @@
           <a:p>
             <a:fld id="{9ED5C3B5-60AD-4494-9CFA-8B02B158E887}" type="datetime1">
               <a:rPr lang="nl-BE" smtClean="0"/>
-              <a:t>13/08/2026</a:t>
+              <a:t>18/08/2026</a:t>
             </a:fld>
             <a:endParaRPr lang="nl-BE"/>
           </a:p>
@@ -3636,7 +3636,7 @@
           <a:p>
             <a:fld id="{1E4894A8-27B8-4F4D-B345-90FD4A1447E9}" type="datetime1">
               <a:rPr lang="nl-BE" smtClean="0"/>
-              <a:t>13/08/2026</a:t>
+              <a:t>18/08/2026</a:t>
             </a:fld>
             <a:endParaRPr lang="nl-BE"/>
           </a:p>
@@ -3924,7 +3924,7 @@
           <a:p>
             <a:fld id="{44F0EF99-E673-4972-A23A-EB3FD1F7D254}" type="datetime1">
               <a:rPr lang="nl-BE" smtClean="0"/>
-              <a:t>13/08/2026</a:t>
+              <a:t>18/08/2026</a:t>
             </a:fld>
             <a:endParaRPr lang="nl-BE"/>
           </a:p>
@@ -25764,10 +25764,9 @@
           <a:p>
             <a:pPr lvl="1"/>
             <a:r>
-              <a:rPr lang="en-US" dirty="0" err="1"/>
-              <a:t>commericial</a:t>
-            </a:r>
-            <a:endParaRPr lang="en-US" dirty="0"/>
+              <a:rPr lang="en-US" dirty="0"/>
+              <a:t>commercial</a:t>
+            </a:r>
           </a:p>
           <a:p>
             <a:pPr lvl="1"/>

--- a/machine_learning_with_python.pptx
+++ b/machine_learning_with_python.pptx
@@ -5773,51 +5773,6 @@
           </a:p>
         </p:txBody>
       </p:sp>
-      <p:pic>
-        <p:nvPicPr>
-          <p:cNvPr id="5" name="Picture 4">
-            <a:extLst>
-              <a:ext uri="{FF2B5EF4-FFF2-40B4-BE49-F238E27FC236}">
-                <a16:creationId xmlns:a16="http://schemas.microsoft.com/office/drawing/2014/main" id="{AE8C05AB-73D0-3874-3825-82B44AB8B7DD}"/>
-              </a:ext>
-            </a:extLst>
-          </p:cNvPr>
-          <p:cNvPicPr>
-            <a:picLocks noChangeAspect="1" noChangeArrowheads="1"/>
-          </p:cNvPicPr>
-          <p:nvPr/>
-        </p:nvPicPr>
-        <p:blipFill rotWithShape="1">
-          <a:blip r:embed="rId4" cstate="print">
-            <a:extLst>
-              <a:ext uri="{28A0092B-C50C-407E-A947-70E740481C1C}">
-                <a14:useLocalDpi xmlns:a14="http://schemas.microsoft.com/office/drawing/2010/main" val="0"/>
-              </a:ext>
-            </a:extLst>
-          </a:blip>
-          <a:srcRect b="16829"/>
-          <a:stretch/>
-        </p:blipFill>
-        <p:spPr bwMode="auto">
-          <a:xfrm>
-            <a:off x="467169" y="226357"/>
-            <a:ext cx="1534493" cy="1422699"/>
-          </a:xfrm>
-          <a:prstGeom prst="rect">
-            <a:avLst/>
-          </a:prstGeom>
-          <a:noFill/>
-          <a:extLst>
-            <a:ext uri="{909E8E84-426E-40DD-AFC4-6F175D3DCCD1}">
-              <a14:hiddenFill xmlns:a14="http://schemas.microsoft.com/office/drawing/2010/main">
-                <a:solidFill>
-                  <a:srgbClr val="FFFFFF"/>
-                </a:solidFill>
-              </a14:hiddenFill>
-            </a:ext>
-          </a:extLst>
-        </p:spPr>
-      </p:pic>
     </p:spTree>
     <p:extLst>
       <p:ext uri="{BB962C8B-B14F-4D97-AF65-F5344CB8AC3E}">

--- a/machine_learning_with_python.pptx
+++ b/machine_learning_with_python.pptx
@@ -231,7 +231,7 @@
             <p14:sldId id="781"/>
           </p14:sldIdLst>
         </p14:section>
-        <p14:section name="Keras" id="{9F3F42B8-B707-44BB-A726-56CA00C9AC2D}">
+        <p14:section name="PyTorch" id="{9F3F42B8-B707-44BB-A726-56CA00C9AC2D}">
           <p14:sldIdLst>
             <p14:sldId id="783"/>
             <p14:sldId id="264"/>
@@ -251,6 +251,10 @@
             <p14:sldId id="284"/>
             <p14:sldId id="769"/>
             <p14:sldId id="770"/>
+          </p14:sldIdLst>
+        </p14:section>
+        <p14:section name="Optional material" id="{96DC4B35-3357-4134-92E2-29E83CE22F06}">
+          <p14:sldIdLst>
             <p14:sldId id="786"/>
             <p14:sldId id="283"/>
             <p14:sldId id="286"/>
